--- a/Fundamentos de DevOps – Clase 1.pptx
+++ b/Fundamentos de DevOps – Clase 1.pptx
@@ -4469,7 +4469,7 @@
         </p:nvGraphicFramePr>
         <p:xfrm>
           <a:off x="825500" y="1663700"/>
-          <a:ext cx="6972300" cy="4142581"/>
+          <a:ext cx="6972300" cy="4142580"/>
         </p:xfrm>
         <a:graphic>
           <a:graphicData uri="http://schemas.openxmlformats.org/drawingml/2006/table">
@@ -10423,50 +10423,6 @@
       </p:grpSpPr>
       <p:sp>
         <p:nvSpPr>
-          <p:cNvPr id="2" name="Text 0"/>
-          <p:cNvSpPr/>
-          <p:nvPr/>
-        </p:nvSpPr>
-        <p:spPr>
-          <a:xfrm>
-            <a:off x="812800" y="6238280"/>
-            <a:ext cx="7674888" cy="238720"/>
-          </a:xfrm>
-          <a:prstGeom prst="rect">
-            <a:avLst/>
-          </a:prstGeom>
-          <a:noFill/>
-          <a:ln/>
-        </p:spPr>
-        <p:txBody>
-          <a:bodyPr wrap="square" lIns="0" tIns="0" rIns="0" bIns="0" rtlCol="0" anchor="t">
-            <a:normAutofit/>
-          </a:bodyPr>
-          <a:lstStyle/>
-          <a:p>
-            <a:pPr marL="0" indent="0" algn="l">
-              <a:lnSpc>
-                <a:spcPts val="1680"/>
-              </a:lnSpc>
-              <a:buNone/>
-            </a:pPr>
-            <a:r>
-              <a:rPr lang="en-US" sz="1200" dirty="0">
-                <a:solidFill>
-                  <a:srgbClr val="5D6862"/>
-                </a:solidFill>
-                <a:latin typeface="Inter" pitchFamily="34" charset="0"/>
-                <a:ea typeface="Inter" pitchFamily="34" charset="-122"/>
-                <a:cs typeface="Inter" pitchFamily="34" charset="-120"/>
-              </a:rPr>
-              <a:t>La idea no es aprender todas las herramientas, sino entender cómo se conectan entre sí.</a:t>
-            </a:r>
-            <a:endParaRPr lang="en-US" sz="1200" dirty="0"/>
-          </a:p>
-        </p:txBody>
-      </p:sp>
-      <p:sp>
-        <p:nvSpPr>
           <p:cNvPr id="3" name="Text 1"/>
           <p:cNvSpPr>
             <a:spLocks noGrp="1"/>
@@ -10716,7 +10672,18 @@
                 <a:ea typeface="Inter" pitchFamily="34" charset="-122"/>
                 <a:cs typeface="Inter" pitchFamily="34" charset="-120"/>
               </a:rPr>
-              <a:t>Git</a:t>
+              <a:t>Git/</a:t>
+            </a:r>
+            <a:r>
+              <a:rPr lang="en-US" sz="1800" dirty="0" err="1">
+                <a:solidFill>
+                  <a:srgbClr val="14181B"/>
+                </a:solidFill>
+                <a:latin typeface="Inter" pitchFamily="34" charset="0"/>
+                <a:ea typeface="Inter" pitchFamily="34" charset="-122"/>
+                <a:cs typeface="Inter" pitchFamily="34" charset="-120"/>
+              </a:rPr>
+              <a:t>Github</a:t>
             </a:r>
             <a:endParaRPr lang="en-US" sz="1800" dirty="0"/>
           </a:p>

--- a/Fundamentos de DevOps – Clase 1.pptx
+++ b/Fundamentos de DevOps – Clase 1.pptx
@@ -7017,7 +7017,7 @@
               <a:buNone/>
             </a:pPr>
             <a:r>
-              <a:rPr lang="en-US" sz="2000" b="1" dirty="0">
+              <a:rPr lang="en-US" sz="2000" b="1" dirty="0" err="1">
                 <a:solidFill>
                   <a:srgbClr val="F2F5F0"/>
                 </a:solidFill>
@@ -7025,7 +7025,40 @@
                 <a:ea typeface="Source Serif 4" pitchFamily="18" charset="-122"/>
                 <a:cs typeface="Source Serif 4" pitchFamily="18" charset="-120"/>
               </a:rPr>
-              <a:t>Usás un copilot por primera vez</a:t>
+              <a:t>Usás</a:t>
+            </a:r>
+            <a:r>
+              <a:rPr lang="en-US" sz="2000" b="1" dirty="0">
+                <a:solidFill>
+                  <a:srgbClr val="F2F5F0"/>
+                </a:solidFill>
+                <a:latin typeface="Source Serif 4" pitchFamily="18" charset="0"/>
+                <a:ea typeface="Source Serif 4" pitchFamily="18" charset="-122"/>
+                <a:cs typeface="Source Serif 4" pitchFamily="18" charset="-120"/>
+              </a:rPr>
+              <a:t> </a:t>
+            </a:r>
+            <a:r>
+              <a:rPr lang="en-US" sz="2000" b="1" dirty="0" err="1">
+                <a:solidFill>
+                  <a:srgbClr val="F2F5F0"/>
+                </a:solidFill>
+                <a:latin typeface="Source Serif 4" pitchFamily="18" charset="0"/>
+                <a:ea typeface="Source Serif 4" pitchFamily="18" charset="-122"/>
+                <a:cs typeface="Source Serif 4" pitchFamily="18" charset="-120"/>
+              </a:rPr>
+              <a:t>una</a:t>
+            </a:r>
+            <a:r>
+              <a:rPr lang="en-US" sz="2000" b="1" dirty="0">
+                <a:solidFill>
+                  <a:srgbClr val="F2F5F0"/>
+                </a:solidFill>
+                <a:latin typeface="Source Serif 4" pitchFamily="18" charset="0"/>
+                <a:ea typeface="Source Serif 4" pitchFamily="18" charset="-122"/>
+                <a:cs typeface="Source Serif 4" pitchFamily="18" charset="-120"/>
+              </a:rPr>
+              <a:t> IA por primera vez</a:t>
             </a:r>
             <a:endParaRPr lang="en-US" sz="2000" dirty="0"/>
           </a:p>
@@ -7741,28 +7774,19 @@
                 <a:ea typeface="Consolas" pitchFamily="49" charset="-122"/>
                 <a:cs typeface="Consolas" pitchFamily="49" charset="-120"/>
               </a:rPr>
-              <a:t>  este curso porque </a:t>
-            </a:r>
-            <a:r>
-              <a:rPr lang="en-US" sz="1200" dirty="0">
-                <a:solidFill>
-                  <a:srgbClr val="8BE37F"/>
+              <a:t>  </a:t>
+            </a:r>
+            <a:r>
+              <a:rPr lang="en-US" sz="1200" dirty="0" err="1">
+                <a:solidFill>
+                  <a:srgbClr val="F2F5F0"/>
                 </a:solidFill>
                 <a:latin typeface="Consolas" pitchFamily="49" charset="0"/>
                 <a:ea typeface="Consolas" pitchFamily="49" charset="-122"/>
                 <a:cs typeface="Consolas" pitchFamily="49" charset="-120"/>
               </a:rPr>
-              <a:t>[TU RAZÓN EN 1 FRASE]</a:t>
-            </a:r>
-            <a:endParaRPr lang="en-US" sz="1200" dirty="0"/>
-          </a:p>
-          <a:p>
-            <a:pPr marL="0" indent="0" algn="l">
-              <a:lnSpc>
-                <a:spcPts val="1800"/>
-              </a:lnSpc>
-              <a:buNone/>
-            </a:pPr>
+              <a:t>esta</a:t>
+            </a:r>
             <a:r>
               <a:rPr lang="en-US" sz="1200" dirty="0">
                 <a:solidFill>
@@ -7772,7 +7796,82 @@
                 <a:ea typeface="Consolas" pitchFamily="49" charset="-122"/>
                 <a:cs typeface="Consolas" pitchFamily="49" charset="-120"/>
               </a:rPr>
-              <a:t>- Sección 'Skills que voy a aprender': Git, Docker, CI/CD, AWS</a:t>
+              <a:t> </a:t>
+            </a:r>
+            <a:r>
+              <a:rPr lang="en-US" sz="1200" dirty="0" err="1">
+                <a:solidFill>
+                  <a:srgbClr val="F2F5F0"/>
+                </a:solidFill>
+                <a:latin typeface="Consolas" pitchFamily="49" charset="0"/>
+                <a:ea typeface="Consolas" pitchFamily="49" charset="-122"/>
+                <a:cs typeface="Consolas" pitchFamily="49" charset="-120"/>
+              </a:rPr>
+              <a:t>microcredencial</a:t>
+            </a:r>
+            <a:r>
+              <a:rPr lang="en-US" sz="1200" dirty="0">
+                <a:solidFill>
+                  <a:srgbClr val="F2F5F0"/>
+                </a:solidFill>
+                <a:latin typeface="Consolas" pitchFamily="49" charset="0"/>
+                <a:ea typeface="Consolas" pitchFamily="49" charset="-122"/>
+                <a:cs typeface="Consolas" pitchFamily="49" charset="-120"/>
+              </a:rPr>
+              <a:t> </a:t>
+            </a:r>
+            <a:r>
+              <a:rPr lang="en-US" sz="1200" dirty="0" err="1">
+                <a:solidFill>
+                  <a:srgbClr val="F2F5F0"/>
+                </a:solidFill>
+                <a:latin typeface="Consolas" pitchFamily="49" charset="0"/>
+                <a:ea typeface="Consolas" pitchFamily="49" charset="-122"/>
+                <a:cs typeface="Consolas" pitchFamily="49" charset="-120"/>
+              </a:rPr>
+              <a:t>porque</a:t>
+            </a:r>
+            <a:r>
+              <a:rPr lang="en-US" sz="1200" dirty="0">
+                <a:solidFill>
+                  <a:srgbClr val="F2F5F0"/>
+                </a:solidFill>
+                <a:latin typeface="Consolas" pitchFamily="49" charset="0"/>
+                <a:ea typeface="Consolas" pitchFamily="49" charset="-122"/>
+                <a:cs typeface="Consolas" pitchFamily="49" charset="-120"/>
+              </a:rPr>
+              <a:t> </a:t>
+            </a:r>
+            <a:r>
+              <a:rPr lang="en-US" sz="1200" dirty="0">
+                <a:solidFill>
+                  <a:srgbClr val="8BE37F"/>
+                </a:solidFill>
+                <a:latin typeface="Consolas" pitchFamily="49" charset="0"/>
+                <a:ea typeface="Consolas" pitchFamily="49" charset="-122"/>
+                <a:cs typeface="Consolas" pitchFamily="49" charset="-120"/>
+              </a:rPr>
+              <a:t>[TU RAZÓN EN 1 FRASE]</a:t>
+            </a:r>
+            <a:endParaRPr lang="en-US" sz="1200" dirty="0"/>
+          </a:p>
+          <a:p>
+            <a:pPr marL="0" indent="0" algn="l">
+              <a:lnSpc>
+                <a:spcPts val="1800"/>
+              </a:lnSpc>
+              <a:buNone/>
+            </a:pPr>
+            <a:r>
+              <a:rPr lang="en-US" sz="1200" dirty="0">
+                <a:solidFill>
+                  <a:srgbClr val="F2F5F0"/>
+                </a:solidFill>
+                <a:latin typeface="Consolas" pitchFamily="49" charset="0"/>
+                <a:ea typeface="Consolas" pitchFamily="49" charset="-122"/>
+                <a:cs typeface="Consolas" pitchFamily="49" charset="-120"/>
+              </a:rPr>
+              <a:t>- Sección 'Skills que voy a aprender': Git, Docker, AWS.</a:t>
             </a:r>
             <a:endParaRPr lang="en-US" sz="1200" dirty="0"/>
           </a:p>
